--- a/01_FoundationProjects/MFL02_DC_Motor_Direction_Control/MFL02_DC_Motor_Direction_Control.pptx
+++ b/01_FoundationProjects/MFL02_DC_Motor_Direction_Control/MFL02_DC_Motor_Direction_Control.pptx
@@ -204,7 +204,7 @@
           <a:p>
             <a:fld id="{5FD08F18-B13D-470D-8890-73D58D6E1132}" type="datetimeFigureOut">
               <a:rPr lang="en-GB" smtClean="0"/>
-              <a:t>26/12/2025</a:t>
+              <a:t>18/01/2026</a:t>
             </a:fld>
             <a:endParaRPr lang="en-GB"/>
           </a:p>
@@ -5742,7 +5742,7 @@
         <p:spPr>
           <a:xfrm>
             <a:off x="6223137" y="4683165"/>
-            <a:ext cx="4582768" cy="1200329"/>
+            <a:ext cx="4582768" cy="1477328"/>
           </a:xfrm>
           <a:prstGeom prst="rect">
             <a:avLst/>
@@ -5768,7 +5768,7 @@
               <a:rPr lang="en-GB" dirty="0">
                 <a:hlinkClick r:id="rId2"/>
               </a:rPr>
-              <a:t>https://github.com/info-zas/zas-robotics-motion/blob/main/01_FoundationProjects/MFL02/MFL02/MFL02.ino</a:t>
+              <a:t>https://github.com/info-zas/zas-robotics-motion/tree/main/01_FoundationProjects/MFL02_DC_Motor_Direction_Control/MFL02_DC_Motor_Direction_Control</a:t>
             </a:r>
             <a:endParaRPr lang="en-GB" dirty="0"/>
           </a:p>
@@ -6079,8 +6079,8 @@
         </p:nvSpPr>
         <p:spPr bwMode="auto">
           <a:xfrm>
-            <a:off x="6096000" y="4159935"/>
-            <a:ext cx="5599912" cy="369332"/>
+            <a:off x="6096000" y="3887143"/>
+            <a:ext cx="5599912" cy="646331"/>
           </a:xfrm>
           <a:prstGeom prst="rect">
             <a:avLst/>
@@ -6192,7 +6192,7 @@
             </a:pPr>
             <a:r>
               <a:rPr lang="en-GB" b="1" dirty="0"/>
-              <a:t>Code for Lesson MFL02 (MFL02.ino):</a:t>
+              <a:t>Code for Lesson MFL02 (MFL02_DC_Motor_Direction_Control.ino):</a:t>
             </a:r>
           </a:p>
         </p:txBody>
@@ -6278,7 +6278,7 @@
         <p:spPr>
           <a:xfrm>
             <a:off x="766916" y="1481094"/>
-            <a:ext cx="6093994" cy="707886"/>
+            <a:ext cx="6093994" cy="400110"/>
           </a:xfrm>
           <a:prstGeom prst="rect">
             <a:avLst/>
@@ -6293,7 +6293,15 @@
           <a:p>
             <a:r>
               <a:rPr lang="en-GB" sz="2000" b="1" dirty="0"/>
-              <a:t>Execute the same code MFL02.ino in the motion creative board</a:t>
+              <a:t>Execute the </a:t>
+            </a:r>
+            <a:r>
+              <a:rPr lang="en-GB" sz="2000" b="1"/>
+              <a:t>same code </a:t>
+            </a:r>
+            <a:r>
+              <a:rPr lang="en-GB" sz="2000" b="1" dirty="0"/>
+              <a:t>in the motion creative board</a:t>
             </a:r>
           </a:p>
         </p:txBody>
@@ -6456,56 +6464,6 @@
       </p:sp>
       <p:sp>
         <p:nvSpPr>
-          <p:cNvPr id="9" name="TextBox 8">
-            <a:extLst>
-              <a:ext uri="{FF2B5EF4-FFF2-40B4-BE49-F238E27FC236}">
-                <a16:creationId xmlns:a16="http://schemas.microsoft.com/office/drawing/2014/main" id="{E3A4D6D7-32E4-5CA3-1E7A-57266DC7D82A}"/>
-              </a:ext>
-            </a:extLst>
-          </p:cNvPr>
-          <p:cNvSpPr txBox="1"/>
-          <p:nvPr/>
-        </p:nvSpPr>
-        <p:spPr>
-          <a:xfrm>
-            <a:off x="766916" y="5521146"/>
-            <a:ext cx="5063987" cy="1200329"/>
-          </a:xfrm>
-          <a:prstGeom prst="rect">
-            <a:avLst/>
-          </a:prstGeom>
-          <a:noFill/>
-          <a:ln w="28575">
-            <a:solidFill>
-              <a:schemeClr val="accent1"/>
-            </a:solidFill>
-          </a:ln>
-        </p:spPr>
-        <p:txBody>
-          <a:bodyPr wrap="square">
-            <a:spAutoFit/>
-          </a:bodyPr>
-          <a:lstStyle>
-            <a:defPPr>
-              <a:defRPr lang="en-US"/>
-            </a:defPPr>
-          </a:lstStyle>
-          <a:p>
-            <a:r>
-              <a:rPr lang="en-GB" dirty="0">
-                <a:hlinkClick r:id="rId3"/>
-              </a:rPr>
-              <a:t>https://github.com/info-zas/zas-robotics-motion/blob/main/01_FoundationProjects/MFL02/MFL02/MFL02.ino</a:t>
-            </a:r>
-            <a:endParaRPr lang="en-GB" dirty="0"/>
-          </a:p>
-          <a:p>
-            <a:endParaRPr lang="en-GB" dirty="0"/>
-          </a:p>
-        </p:txBody>
-      </p:sp>
-      <p:sp>
-        <p:nvSpPr>
           <p:cNvPr id="5" name="Date Placeholder 4">
             <a:extLst>
               <a:ext uri="{FF2B5EF4-FFF2-40B4-BE49-F238E27FC236}">
@@ -6576,7 +6534,7 @@
           <p:nvPr/>
         </p:nvPicPr>
         <p:blipFill>
-          <a:blip r:embed="rId4" cstate="print">
+          <a:blip r:embed="rId3" cstate="print">
             <a:extLst>
               <a:ext uri="{28A0092B-C50C-407E-A947-70E740481C1C}">
                 <a14:useLocalDpi xmlns:a14="http://schemas.microsoft.com/office/drawing/2010/main" val="0"/>
@@ -6681,20 +6639,70 @@
       </p:sp>
       <p:sp>
         <p:nvSpPr>
-          <p:cNvPr id="14" name="TextBox 13">
-            <a:extLst>
-              <a:ext uri="{FF2B5EF4-FFF2-40B4-BE49-F238E27FC236}">
-                <a16:creationId xmlns:a16="http://schemas.microsoft.com/office/drawing/2014/main" id="{CA9C0A06-B7E2-C221-3BB1-5924AAB16D6C}"/>
+          <p:cNvPr id="2" name="TextBox 1">
+            <a:extLst>
+              <a:ext uri="{FF2B5EF4-FFF2-40B4-BE49-F238E27FC236}">
+                <a16:creationId xmlns:a16="http://schemas.microsoft.com/office/drawing/2014/main" id="{70BB2196-B27C-CE0A-AC8B-A45BA23FCE62}"/>
               </a:ext>
             </a:extLst>
           </p:cNvPr>
           <p:cNvSpPr txBox="1"/>
           <p:nvPr/>
         </p:nvSpPr>
+        <p:spPr>
+          <a:xfrm>
+            <a:off x="838200" y="5487689"/>
+            <a:ext cx="4582768" cy="954107"/>
+          </a:xfrm>
+          <a:prstGeom prst="rect">
+            <a:avLst/>
+          </a:prstGeom>
+          <a:noFill/>
+          <a:ln w="28575">
+            <a:solidFill>
+              <a:schemeClr val="accent1"/>
+            </a:solidFill>
+          </a:ln>
+        </p:spPr>
+        <p:txBody>
+          <a:bodyPr wrap="square">
+            <a:spAutoFit/>
+          </a:bodyPr>
+          <a:lstStyle>
+            <a:defPPr>
+              <a:defRPr lang="en-US"/>
+            </a:defPPr>
+          </a:lstStyle>
+          <a:p>
+            <a:r>
+              <a:rPr lang="en-GB" sz="1400" dirty="0">
+                <a:hlinkClick r:id="rId4"/>
+              </a:rPr>
+              <a:t>https://github.com/info-zas/zas-robotics-motion/tree/main/01_FoundationProjects/MFL02_DC_Motor_Direction_Control/MFL02_DC_Motor_Direction_Control</a:t>
+            </a:r>
+            <a:endParaRPr lang="en-GB" sz="1400" dirty="0"/>
+          </a:p>
+          <a:p>
+            <a:endParaRPr lang="en-GB" sz="1400" dirty="0"/>
+          </a:p>
+        </p:txBody>
+      </p:sp>
+      <p:sp>
+        <p:nvSpPr>
+          <p:cNvPr id="11" name="TextBox 10">
+            <a:extLst>
+              <a:ext uri="{FF2B5EF4-FFF2-40B4-BE49-F238E27FC236}">
+                <a16:creationId xmlns:a16="http://schemas.microsoft.com/office/drawing/2014/main" id="{D65A8A39-1A4C-05D7-4BCB-D6C96CFE2022}"/>
+              </a:ext>
+            </a:extLst>
+          </p:cNvPr>
+          <p:cNvSpPr txBox="1"/>
+          <p:nvPr/>
+        </p:nvSpPr>
         <p:spPr bwMode="auto">
           <a:xfrm>
-            <a:off x="766916" y="5265083"/>
-            <a:ext cx="3952568" cy="369332"/>
+            <a:off x="766916" y="5200616"/>
+            <a:ext cx="5599912" cy="307777"/>
           </a:xfrm>
           <a:prstGeom prst="rect">
             <a:avLst/>
@@ -6805,8 +6813,8 @@
               <a:defRPr/>
             </a:pPr>
             <a:r>
-              <a:rPr lang="en-GB" b="1" dirty="0"/>
-              <a:t>Code for Lesson MFL02 (MFL02.ino):</a:t>
+              <a:rPr lang="en-GB" sz="1400" b="1" dirty="0"/>
+              <a:t>Code for Lesson MFL02 (MFL02_DC_Motor_Direction_Control.ino):</a:t>
             </a:r>
           </a:p>
         </p:txBody>
